--- a/courses/learn_legalization/module02-05-abacus-row-pack/slides.pptx
+++ b/courses/learn_legalization/module02-05-abacus-row-pack/slides.pptx
@@ -16,6 +16,9 @@
     <p:sldId id="264" r:id="rId16"/>
     <p:sldId id="265" r:id="rId17"/>
     <p:sldId id="266" r:id="rId18"/>
+    <p:sldId id="267" r:id="rId19"/>
+    <p:sldId id="268" r:id="rId20"/>
+    <p:sldId id="269" r:id="rId21"/>
   </p:sldIdLst>
   <p:sldSz cx="12191695" cy="6858000" type="screen4x3"/>
   <p:notesSz cx="6858000" cy="9144000"/>
@@ -582,7 +585,7 @@
           <a:lstStyle/>
           <a:p>
             <a:r>
-              <a:t>Common traps: assuming snap alone legalizes; forgetting site width when checking overlap; ignoring fixed macro D at (8, 4); reporting HPWL without legality; and comparing Abacus and Tetris without naming displacement versus wirelength tradeoffs.</a:t>
+              <a:t>In the browser lab track, open the **abacus-row-pack** lab from the tools shelf. Open the interactive lab, place or snap cells on the site and row grid—or use an Apply helper—then Check. Reveal golden is study-only. Work the challenges that lock the goldens, then come back to implement the same loop yourself.</a:t>
             </a:r>
           </a:p>
         </p:txBody>
@@ -652,6 +655,146 @@
           <a:lstStyle/>
           <a:p>
             <a:r>
+              <a:t>In the implement track, open this module's EXAMPLES.md Pseudocode section and the course common solvers. Parse `tiny_legal.json`, run the algorithm with deterministic coordinates, and print legality, displacement, and HPWL. Match the browser goldens before you claim the checklist.</a:t>
+            </a:r>
+          </a:p>
+        </p:txBody>
+      </p:sp>
+      <p:sp>
+        <p:nvSpPr>
+          <p:cNvPr id="4" name="Slide Number Placeholder 3"/>
+          <p:cNvSpPr>
+            <a:spLocks noGrp="1"/>
+          </p:cNvSpPr>
+          <p:nvPr>
+            <p:ph type="sldNum" idx="5" sz="quarter"/>
+          </p:nvPr>
+        </p:nvSpPr>
+        <p:spPr/>
+      </p:sp>
+    </p:spTree>
+  </p:cSld>
+  <p:clrMapOvr>
+    <a:masterClrMapping/>
+  </p:clrMapOvr>
+</p:notes>
+</file>
+
+<file path=ppt/notesSlides/notesSlide12.xml><?xml version="1.0" encoding="utf-8"?>
+<p:notes xmlns:a="http://schemas.openxmlformats.org/drawingml/2006/main" xmlns:p="http://schemas.openxmlformats.org/presentationml/2006/main" xmlns:r="http://schemas.openxmlformats.org/officeDocument/2006/relationships">
+  <p:cSld>
+    <p:spTree>
+      <p:nvGrpSpPr>
+        <p:cNvPr id="1" name=""/>
+        <p:cNvGrpSpPr/>
+        <p:nvPr/>
+      </p:nvGrpSpPr>
+      <p:grpSpPr>
+        <a:xfrm>
+          <a:off x="0" y="0"/>
+          <a:ext cx="0" cy="0"/>
+          <a:chOff x="0" y="0"/>
+          <a:chExt cx="0" cy="0"/>
+        </a:xfrm>
+      </p:grpSpPr>
+      <p:sp>
+        <p:nvSpPr>
+          <p:cNvPr id="2" name="Slide Image Placeholder 1"/>
+          <p:cNvSpPr>
+            <a:spLocks noGrp="1"/>
+          </p:cNvSpPr>
+          <p:nvPr>
+            <p:ph type="sldImg" idx="2"/>
+          </p:nvPr>
+        </p:nvSpPr>
+        <p:spPr/>
+      </p:sp>
+      <p:sp>
+        <p:nvSpPr>
+          <p:cNvPr id="3" name="Notes Placeholder 2"/>
+          <p:cNvSpPr>
+            <a:spLocks noGrp="1"/>
+          </p:cNvSpPr>
+          <p:nvPr>
+            <p:ph type="body" idx="3" sz="quarter"/>
+          </p:nvPr>
+        </p:nvSpPr>
+        <p:spPr/>
+        <p:txBody>
+          <a:bodyPr/>
+          <a:lstStyle/>
+          <a:p>
+            <a:r>
+              <a:t>Common traps: assuming snap alone legalizes; forgetting site width when checking overlap; ignoring fixed macro D at (8, 4); reporting HPWL without legality; and comparing Abacus and Tetris without naming displacement versus wirelength tradeoffs.</a:t>
+            </a:r>
+          </a:p>
+        </p:txBody>
+      </p:sp>
+      <p:sp>
+        <p:nvSpPr>
+          <p:cNvPr id="4" name="Slide Number Placeholder 3"/>
+          <p:cNvSpPr>
+            <a:spLocks noGrp="1"/>
+          </p:cNvSpPr>
+          <p:nvPr>
+            <p:ph type="sldNum" idx="5" sz="quarter"/>
+          </p:nvPr>
+        </p:nvSpPr>
+        <p:spPr/>
+      </p:sp>
+    </p:spTree>
+  </p:cSld>
+  <p:clrMapOvr>
+    <a:masterClrMapping/>
+  </p:clrMapOvr>
+</p:notes>
+</file>
+
+<file path=ppt/notesSlides/notesSlide13.xml><?xml version="1.0" encoding="utf-8"?>
+<p:notes xmlns:a="http://schemas.openxmlformats.org/drawingml/2006/main" xmlns:p="http://schemas.openxmlformats.org/presentationml/2006/main" xmlns:r="http://schemas.openxmlformats.org/officeDocument/2006/relationships">
+  <p:cSld>
+    <p:spTree>
+      <p:nvGrpSpPr>
+        <p:cNvPr id="1" name=""/>
+        <p:cNvGrpSpPr/>
+        <p:nvPr/>
+      </p:nvGrpSpPr>
+      <p:grpSpPr>
+        <a:xfrm>
+          <a:off x="0" y="0"/>
+          <a:ext cx="0" cy="0"/>
+          <a:chOff x="0" y="0"/>
+          <a:chExt cx="0" cy="0"/>
+        </a:xfrm>
+      </p:grpSpPr>
+      <p:sp>
+        <p:nvSpPr>
+          <p:cNvPr id="2" name="Slide Image Placeholder 1"/>
+          <p:cNvSpPr>
+            <a:spLocks noGrp="1"/>
+          </p:cNvSpPr>
+          <p:nvPr>
+            <p:ph type="sldImg" idx="2"/>
+          </p:nvPr>
+        </p:nvSpPr>
+        <p:spPr/>
+      </p:sp>
+      <p:sp>
+        <p:nvSpPr>
+          <p:cNvPr id="3" name="Notes Placeholder 2"/>
+          <p:cNvSpPr>
+            <a:spLocks noGrp="1"/>
+          </p:cNvSpPr>
+          <p:nvPr>
+            <p:ph type="body" idx="3" sz="quarter"/>
+          </p:nvPr>
+        </p:nvSpPr>
+        <p:spPr/>
+        <p:txBody>
+          <a:bodyPr/>
+          <a:lstStyle/>
+          <a:p>
+            <a:r>
               <a:t>Complete the checklist for at least one track—preferably both. Implement until your metrics match the starter goldens. When you're ready, take the short quiz, then continue to the next module.</a:t>
             </a:r>
           </a:p>
@@ -725,12 +868,6 @@
               <a:t>Cross-row spread beats single-row shelf pack on displacement—four versus six here—with HPWL thirty-eight versus thirty-two for Tetris. Abacus is the detailed legalizer in this course: more search, less movement.</a:t>
             </a:r>
           </a:p>
-          <a:p/>
-          <a:p>
-            <a:r>
-              <a:t>&lt;!-- algorithm-walkthrough --&gt;</a:t>
-            </a:r>
-          </a:p>
         </p:txBody>
       </p:sp>
       <p:sp>
@@ -798,7 +935,13 @@
           <a:lstStyle/>
           <a:p>
             <a:r>
-              <a:t>Abacus-lite processes movables by increasing original x. From the same overlap seed as overlap removal, it tries each row and picks the placement with minimum L1 displacement.</a:t>
+              <a:t>Abacus needs a nested loop in pseudocode: outer cells in x order, inner trial of every row. For each trial you compute leftmost legal x and an L1 cost back to the origin, then keep the cheapest row.</a:t>
+            </a:r>
+          </a:p>
+          <a:p/>
+          <a:p>
+            <a:r>
+              <a:t>Open this module's examples file and find the Pseudocode section. That written sketch is what you implement on the implement track and what the browser challenges measure.</a:t>
             </a:r>
           </a:p>
         </p:txBody>
@@ -868,7 +1011,7 @@
           <a:lstStyle/>
           <a:p>
             <a:r>
-              <a:t>Cell A tries rows zero, two, four—picks row two at x four (zero displacement). B chooses row zero at x four. C chooses row four at x four. Cross-row spread beats single-row pack.</a:t>
+              <a:t>Fixed macros sit first so their intervals block later trials. On the overlap seed the sketch lands A at four two, B at four zero, C at four four—displacement four and HPWL thirty-eight, tighter movement than Tetris.</a:t>
             </a:r>
           </a:p>
         </p:txBody>
@@ -938,7 +1081,7 @@
           <a:lstStyle/>
           <a:p>
             <a:r>
-              <a:t>Final Abacus layout: A on middle row, B on bottom, C on top—all at x equals four but on different rows. D, E, F stay at their seed coordinates.</a:t>
+              <a:t>Abacus-lite processes movables by increasing original x. From the same overlap seed as overlap removal, it tries each row and picks the placement with minimum L1 displacement.</a:t>
             </a:r>
           </a:p>
         </p:txBody>
@@ -1008,7 +1151,7 @@
           <a:lstStyle/>
           <a:p>
             <a:r>
-              <a:t>Abacus displacement is four versus six for overlap removal / Tetris on this seed. You pay three HPWL points—thirty-eight versus thirty-two—for staying closer to global targets.</a:t>
+              <a:t>Cell A tries rows zero, two, four—picks row two at x four (zero displacement). B chooses row zero at x four. C chooses row four at x four. Cross-row spread beats single-row pack.</a:t>
             </a:r>
           </a:p>
         </p:txBody>
@@ -1078,13 +1221,7 @@
           <a:lstStyle/>
           <a:p>
             <a:r>
-              <a:t>Abacus is the detailed legalizer in this course: try rows, pick min displacement. Use it when staying near global coordinates matters more than the last HPWL point.</a:t>
-            </a:r>
-          </a:p>
-          <a:p/>
-          <a:p>
-            <a:r>
-              <a:t>&lt;!-- /algorithm-walkthrough --&gt;</a:t>
+              <a:t>Final Abacus layout: A on middle row, B on bottom, C on top—all at x equals four but on different rows. D, E, F stay at their seed coordinates.</a:t>
             </a:r>
           </a:p>
         </p:txBody>
@@ -1154,7 +1291,7 @@
           <a:lstStyle/>
           <a:p>
             <a:r>
-              <a:t>In the browser lab track, open the **abacus-row-pack** lab from the tools shelf. Load the overlap or float starter, run the legalizer once, and read legality plus displacement and HPWL when the panel shows them. Work the challenges that lock the goldens, then come back to implement the same loop yourself.</a:t>
+              <a:t>Abacus displacement is four versus six for overlap removal / Tetris on this seed. You pay three HPWL points—thirty-eight versus thirty-two—for staying closer to global targets.</a:t>
             </a:r>
           </a:p>
         </p:txBody>
@@ -1224,7 +1361,7 @@
           <a:lstStyle/>
           <a:p>
             <a:r>
-              <a:t>In the implement track, open this module's examples and the course `common/` solvers. Parse `tiny_legal.json`, run the algorithm with deterministic coordinates, and print legality, displacement, and HPWL. Match the browser goldens before you claim the checklist.</a:t>
+              <a:t>Abacus is the detailed legalizer in this course: try rows, pick min displacement. Use it when staying near global coordinates matters more than the last HPWL point.</a:t>
             </a:r>
           </a:p>
         </p:txBody>
@@ -4382,21 +4519,45 @@
                 </a:solidFill>
                 <a:latin typeface="Calibri"/>
               </a:rPr>
-              <a:t>Pitfalls</a:t>
-            </a:r>
-          </a:p>
-        </p:txBody>
-      </p:sp>
-      <p:sp>
-        <p:nvSpPr>
-          <p:cNvPr id="3" name="TextBox 2"/>
+              <a:t>Abacus minimizes movement</a:t>
+            </a:r>
+          </a:p>
+        </p:txBody>
+      </p:sp>
+      <p:pic>
+        <p:nvPicPr>
+          <p:cNvPr id="3" name="Picture 2" descr="05-takeaway.png"/>
+          <p:cNvPicPr>
+            <a:picLocks noChangeAspect="1"/>
+          </p:cNvPicPr>
+          <p:nvPr/>
+        </p:nvPicPr>
+        <p:blipFill>
+          <a:blip r:embed="rId2"/>
+          <a:stretch>
+            <a:fillRect/>
+          </a:stretch>
+        </p:blipFill>
+        <p:spPr>
+          <a:xfrm>
+            <a:off x="548640" y="1143000"/>
+            <a:ext cx="9404113" cy="4572000"/>
+          </a:xfrm>
+          <a:prstGeom prst="rect">
+            <a:avLst/>
+          </a:prstGeom>
+        </p:spPr>
+      </p:pic>
+      <p:sp>
+        <p:nvSpPr>
+          <p:cNvPr id="4" name="TextBox 3"/>
           <p:cNvSpPr txBox="1"/>
           <p:nvPr/>
         </p:nvSpPr>
         <p:spPr>
           <a:xfrm>
-            <a:off x="548640" y="1234440"/>
-            <a:ext cx="11064240" cy="4937760"/>
+            <a:off x="548640" y="5897880"/>
+            <a:ext cx="11064240" cy="411480"/>
           </a:xfrm>
           <a:prstGeom prst="rect">
             <a:avLst/>
@@ -4409,32 +4570,26 @@
           </a:bodyPr>
           <a:lstStyle/>
           <a:p>
-            <a:pPr lvl="0" marL="457200" indent="-228600">
-              <a:buFont typeface="Calibri"/>
-              <a:spcAft>
-                <a:spcPts val="1000"/>
-              </a:spcAft>
-              <a:buSzPct val="100000"/>
-              <a:buChar char="•"/>
+            <a:pPr>
               <a:lnSpc>
                 <a:spcPts val="2200"/>
               </a:lnSpc>
             </a:pPr>
             <a:r>
-              <a:rPr sz="2000" b="0">
+              <a:rPr sz="1200" b="0">
                 <a:solidFill>
                   <a:srgbClr val="333333"/>
                 </a:solidFill>
                 <a:latin typeface="Calibri"/>
               </a:rPr>
-              <a:t>Common traps</a:t>
-            </a:r>
-          </a:p>
-        </p:txBody>
-      </p:sp>
-      <p:sp>
-        <p:nvSpPr>
-          <p:cNvPr id="4" name="TextBox 3"/>
+              <a:t>Abacus minimizes movement</a:t>
+            </a:r>
+          </a:p>
+        </p:txBody>
+      </p:sp>
+      <p:sp>
+        <p:nvSpPr>
+          <p:cNvPr id="5" name="TextBox 4"/>
           <p:cNvSpPr txBox="1"/>
           <p:nvPr/>
         </p:nvSpPr>
@@ -4523,6 +4678,557 @@
                 </a:solidFill>
                 <a:latin typeface="Calibri"/>
               </a:rPr>
+              <a:t>Browser lab track</a:t>
+            </a:r>
+          </a:p>
+        </p:txBody>
+      </p:sp>
+      <p:sp>
+        <p:nvSpPr>
+          <p:cNvPr id="3" name="TextBox 2"/>
+          <p:cNvSpPr txBox="1"/>
+          <p:nvPr/>
+        </p:nvSpPr>
+        <p:spPr>
+          <a:xfrm>
+            <a:off x="548640" y="1234440"/>
+            <a:ext cx="11064240" cy="4937760"/>
+          </a:xfrm>
+          <a:prstGeom prst="rect">
+            <a:avLst/>
+          </a:prstGeom>
+          <a:noFill/>
+        </p:spPr>
+        <p:txBody>
+          <a:bodyPr wrap="square">
+            <a:noAutofit/>
+          </a:bodyPr>
+          <a:lstStyle/>
+          <a:p>
+            <a:pPr lvl="0" marL="457200" indent="-228600">
+              <a:buFont typeface="Calibri"/>
+              <a:spcAft>
+                <a:spcPts val="1000"/>
+              </a:spcAft>
+              <a:buSzPct val="100000"/>
+              <a:buChar char="•"/>
+              <a:lnSpc>
+                <a:spcPts val="2200"/>
+              </a:lnSpc>
+            </a:pPr>
+            <a:r>
+              <a:rPr sz="2000" b="0">
+                <a:solidFill>
+                  <a:srgbClr val="333333"/>
+                </a:solidFill>
+                <a:latin typeface="Calibri"/>
+              </a:rPr>
+              <a:t>In the browser lab track, open the </a:t>
+            </a:r>
+            <a:r>
+              <a:rPr sz="2000" b="1">
+                <a:solidFill>
+                  <a:srgbClr val="333333"/>
+                </a:solidFill>
+                <a:latin typeface="Calibri"/>
+              </a:rPr>
+              <a:t>abacus-row-pack</a:t>
+            </a:r>
+            <a:r>
+              <a:rPr sz="2000" b="0">
+                <a:solidFill>
+                  <a:srgbClr val="333333"/>
+                </a:solidFill>
+                <a:latin typeface="Calibri"/>
+              </a:rPr>
+              <a:t> lab from the tools shelf</a:t>
+            </a:r>
+          </a:p>
+          <a:p>
+            <a:pPr lvl="0" marL="457200" indent="-228600">
+              <a:buFont typeface="Calibri"/>
+              <a:spcAft>
+                <a:spcPts val="1000"/>
+              </a:spcAft>
+              <a:buSzPct val="100000"/>
+              <a:buChar char="•"/>
+              <a:lnSpc>
+                <a:spcPts val="2200"/>
+              </a:lnSpc>
+            </a:pPr>
+            <a:r>
+              <a:rPr sz="2000" b="0">
+                <a:solidFill>
+                  <a:srgbClr val="333333"/>
+                </a:solidFill>
+                <a:latin typeface="Calibri"/>
+              </a:rPr>
+              <a:t>Open the interactive lab</a:t>
+            </a:r>
+          </a:p>
+          <a:p>
+            <a:pPr lvl="0" marL="457200" indent="-228600">
+              <a:buFont typeface="Calibri"/>
+              <a:spcAft>
+                <a:spcPts val="1000"/>
+              </a:spcAft>
+              <a:buSzPct val="100000"/>
+              <a:buChar char="•"/>
+              <a:lnSpc>
+                <a:spcPts val="2200"/>
+              </a:lnSpc>
+            </a:pPr>
+            <a:r>
+              <a:rPr sz="2000" b="0">
+                <a:solidFill>
+                  <a:srgbClr val="333333"/>
+                </a:solidFill>
+                <a:latin typeface="Calibri"/>
+              </a:rPr>
+              <a:t>Reveal golden is study-only</a:t>
+            </a:r>
+          </a:p>
+          <a:p>
+            <a:pPr lvl="0" marL="457200" indent="-228600">
+              <a:buFont typeface="Calibri"/>
+              <a:spcAft>
+                <a:spcPts val="1000"/>
+              </a:spcAft>
+              <a:buSzPct val="100000"/>
+              <a:buChar char="•"/>
+              <a:lnSpc>
+                <a:spcPts val="2200"/>
+              </a:lnSpc>
+            </a:pPr>
+            <a:r>
+              <a:rPr sz="2000" b="0">
+                <a:solidFill>
+                  <a:srgbClr val="333333"/>
+                </a:solidFill>
+                <a:latin typeface="Calibri"/>
+              </a:rPr>
+              <a:t>Work the challenges that lock the goldens</a:t>
+            </a:r>
+          </a:p>
+        </p:txBody>
+      </p:sp>
+      <p:sp>
+        <p:nvSpPr>
+          <p:cNvPr id="4" name="TextBox 3"/>
+          <p:cNvSpPr txBox="1"/>
+          <p:nvPr/>
+        </p:nvSpPr>
+        <p:spPr>
+          <a:xfrm>
+            <a:off x="548640" y="6355080"/>
+            <a:ext cx="11064240" cy="320040"/>
+          </a:xfrm>
+          <a:prstGeom prst="rect">
+            <a:avLst/>
+          </a:prstGeom>
+          <a:noFill/>
+        </p:spPr>
+        <p:txBody>
+          <a:bodyPr wrap="square">
+            <a:noAutofit/>
+          </a:bodyPr>
+          <a:lstStyle/>
+          <a:p>
+            <a:pPr algn="r">
+              <a:lnSpc>
+                <a:spcPts val="2200"/>
+              </a:lnSpc>
+              <a:defRPr sz="1000" b="0">
+                <a:solidFill>
+                  <a:srgbClr val="666666"/>
+                </a:solidFill>
+                <a:latin typeface="Calibri"/>
+              </a:defRPr>
+            </a:pPr>
+            <a:r>
+              <a:t>learn_legalization — 05 abacus row pack</a:t>
+            </a:r>
+          </a:p>
+        </p:txBody>
+      </p:sp>
+    </p:spTree>
+  </p:cSld>
+  <p:clrMapOvr>
+    <a:masterClrMapping/>
+  </p:clrMapOvr>
+</p:sld>
+</file>
+
+<file path=ppt/slides/slide12.xml><?xml version="1.0" encoding="utf-8"?>
+<p:sld xmlns:a="http://schemas.openxmlformats.org/drawingml/2006/main" xmlns:p="http://schemas.openxmlformats.org/presentationml/2006/main" xmlns:r="http://schemas.openxmlformats.org/officeDocument/2006/relationships">
+  <p:cSld>
+    <p:spTree>
+      <p:nvGrpSpPr>
+        <p:cNvPr id="1" name=""/>
+        <p:cNvGrpSpPr/>
+        <p:nvPr/>
+      </p:nvGrpSpPr>
+      <p:grpSpPr/>
+      <p:sp>
+        <p:nvSpPr>
+          <p:cNvPr id="2" name="TextBox 1"/>
+          <p:cNvSpPr txBox="1"/>
+          <p:nvPr/>
+        </p:nvSpPr>
+        <p:spPr>
+          <a:xfrm>
+            <a:off x="548640" y="411480"/>
+            <a:ext cx="11064240" cy="777240"/>
+          </a:xfrm>
+          <a:prstGeom prst="rect">
+            <a:avLst/>
+          </a:prstGeom>
+          <a:noFill/>
+        </p:spPr>
+        <p:txBody>
+          <a:bodyPr wrap="square">
+            <a:noAutofit/>
+          </a:bodyPr>
+          <a:lstStyle/>
+          <a:p>
+            <a:pPr>
+              <a:lnSpc>
+                <a:spcPts val="2200"/>
+              </a:lnSpc>
+            </a:pPr>
+            <a:r>
+              <a:rPr sz="2800" b="1">
+                <a:solidFill>
+                  <a:srgbClr val="1A1A2E"/>
+                </a:solidFill>
+                <a:latin typeface="Calibri"/>
+              </a:rPr>
+              <a:t>Implement track</a:t>
+            </a:r>
+          </a:p>
+        </p:txBody>
+      </p:sp>
+      <p:sp>
+        <p:nvSpPr>
+          <p:cNvPr id="3" name="TextBox 2"/>
+          <p:cNvSpPr txBox="1"/>
+          <p:nvPr/>
+        </p:nvSpPr>
+        <p:spPr>
+          <a:xfrm>
+            <a:off x="548640" y="1234440"/>
+            <a:ext cx="11064240" cy="4937760"/>
+          </a:xfrm>
+          <a:prstGeom prst="rect">
+            <a:avLst/>
+          </a:prstGeom>
+          <a:noFill/>
+        </p:spPr>
+        <p:txBody>
+          <a:bodyPr wrap="square">
+            <a:noAutofit/>
+          </a:bodyPr>
+          <a:lstStyle/>
+          <a:p>
+            <a:pPr lvl="0" marL="457200" indent="-228600">
+              <a:buFont typeface="Calibri"/>
+              <a:spcAft>
+                <a:spcPts val="1000"/>
+              </a:spcAft>
+              <a:buSzPct val="100000"/>
+              <a:buChar char="•"/>
+              <a:lnSpc>
+                <a:spcPts val="2200"/>
+              </a:lnSpc>
+            </a:pPr>
+            <a:r>
+              <a:rPr sz="2000" b="0">
+                <a:solidFill>
+                  <a:srgbClr val="333333"/>
+                </a:solidFill>
+                <a:latin typeface="Calibri"/>
+              </a:rPr>
+              <a:t>In the implement track</a:t>
+            </a:r>
+          </a:p>
+          <a:p>
+            <a:pPr lvl="0" marL="457200" indent="-228600">
+              <a:buFont typeface="Calibri"/>
+              <a:spcAft>
+                <a:spcPts val="1000"/>
+              </a:spcAft>
+              <a:buSzPct val="100000"/>
+              <a:buChar char="•"/>
+              <a:lnSpc>
+                <a:spcPts val="2200"/>
+              </a:lnSpc>
+            </a:pPr>
+            <a:r>
+              <a:rPr sz="2000" b="0">
+                <a:solidFill>
+                  <a:srgbClr val="333333"/>
+                </a:solidFill>
+                <a:latin typeface="Calibri"/>
+              </a:rPr>
+              <a:t>Parse `tiny_legal.json`, run the algorithm with deterministic coordinates</a:t>
+            </a:r>
+          </a:p>
+          <a:p>
+            <a:pPr lvl="0" marL="457200" indent="-228600">
+              <a:buFont typeface="Calibri"/>
+              <a:spcAft>
+                <a:spcPts val="1000"/>
+              </a:spcAft>
+              <a:buSzPct val="100000"/>
+              <a:buChar char="•"/>
+              <a:lnSpc>
+                <a:spcPts val="2200"/>
+              </a:lnSpc>
+            </a:pPr>
+            <a:r>
+              <a:rPr sz="2000" b="0">
+                <a:solidFill>
+                  <a:srgbClr val="333333"/>
+                </a:solidFill>
+                <a:latin typeface="Calibri"/>
+              </a:rPr>
+              <a:t>Match the browser goldens before you claim the checklist</a:t>
+            </a:r>
+          </a:p>
+        </p:txBody>
+      </p:sp>
+      <p:sp>
+        <p:nvSpPr>
+          <p:cNvPr id="4" name="TextBox 3"/>
+          <p:cNvSpPr txBox="1"/>
+          <p:nvPr/>
+        </p:nvSpPr>
+        <p:spPr>
+          <a:xfrm>
+            <a:off x="548640" y="6355080"/>
+            <a:ext cx="11064240" cy="320040"/>
+          </a:xfrm>
+          <a:prstGeom prst="rect">
+            <a:avLst/>
+          </a:prstGeom>
+          <a:noFill/>
+        </p:spPr>
+        <p:txBody>
+          <a:bodyPr wrap="square">
+            <a:noAutofit/>
+          </a:bodyPr>
+          <a:lstStyle/>
+          <a:p>
+            <a:pPr algn="r">
+              <a:lnSpc>
+                <a:spcPts val="2200"/>
+              </a:lnSpc>
+              <a:defRPr sz="1000" b="0">
+                <a:solidFill>
+                  <a:srgbClr val="666666"/>
+                </a:solidFill>
+                <a:latin typeface="Calibri"/>
+              </a:defRPr>
+            </a:pPr>
+            <a:r>
+              <a:t>learn_legalization — 05 abacus row pack</a:t>
+            </a:r>
+          </a:p>
+        </p:txBody>
+      </p:sp>
+    </p:spTree>
+  </p:cSld>
+  <p:clrMapOvr>
+    <a:masterClrMapping/>
+  </p:clrMapOvr>
+</p:sld>
+</file>
+
+<file path=ppt/slides/slide13.xml><?xml version="1.0" encoding="utf-8"?>
+<p:sld xmlns:a="http://schemas.openxmlformats.org/drawingml/2006/main" xmlns:p="http://schemas.openxmlformats.org/presentationml/2006/main" xmlns:r="http://schemas.openxmlformats.org/officeDocument/2006/relationships">
+  <p:cSld>
+    <p:spTree>
+      <p:nvGrpSpPr>
+        <p:cNvPr id="1" name=""/>
+        <p:cNvGrpSpPr/>
+        <p:nvPr/>
+      </p:nvGrpSpPr>
+      <p:grpSpPr/>
+      <p:sp>
+        <p:nvSpPr>
+          <p:cNvPr id="2" name="TextBox 1"/>
+          <p:cNvSpPr txBox="1"/>
+          <p:nvPr/>
+        </p:nvSpPr>
+        <p:spPr>
+          <a:xfrm>
+            <a:off x="548640" y="411480"/>
+            <a:ext cx="11064240" cy="777240"/>
+          </a:xfrm>
+          <a:prstGeom prst="rect">
+            <a:avLst/>
+          </a:prstGeom>
+          <a:noFill/>
+        </p:spPr>
+        <p:txBody>
+          <a:bodyPr wrap="square">
+            <a:noAutofit/>
+          </a:bodyPr>
+          <a:lstStyle/>
+          <a:p>
+            <a:pPr>
+              <a:lnSpc>
+                <a:spcPts val="2200"/>
+              </a:lnSpc>
+            </a:pPr>
+            <a:r>
+              <a:rPr sz="2800" b="1">
+                <a:solidFill>
+                  <a:srgbClr val="1A1A2E"/>
+                </a:solidFill>
+                <a:latin typeface="Calibri"/>
+              </a:rPr>
+              <a:t>Pitfalls</a:t>
+            </a:r>
+          </a:p>
+        </p:txBody>
+      </p:sp>
+      <p:sp>
+        <p:nvSpPr>
+          <p:cNvPr id="3" name="TextBox 2"/>
+          <p:cNvSpPr txBox="1"/>
+          <p:nvPr/>
+        </p:nvSpPr>
+        <p:spPr>
+          <a:xfrm>
+            <a:off x="548640" y="1234440"/>
+            <a:ext cx="11064240" cy="4937760"/>
+          </a:xfrm>
+          <a:prstGeom prst="rect">
+            <a:avLst/>
+          </a:prstGeom>
+          <a:noFill/>
+        </p:spPr>
+        <p:txBody>
+          <a:bodyPr wrap="square">
+            <a:noAutofit/>
+          </a:bodyPr>
+          <a:lstStyle/>
+          <a:p>
+            <a:pPr lvl="0" marL="457200" indent="-228600">
+              <a:buFont typeface="Calibri"/>
+              <a:spcAft>
+                <a:spcPts val="1000"/>
+              </a:spcAft>
+              <a:buSzPct val="100000"/>
+              <a:buChar char="•"/>
+              <a:lnSpc>
+                <a:spcPts val="2200"/>
+              </a:lnSpc>
+            </a:pPr>
+            <a:r>
+              <a:rPr sz="2000" b="0">
+                <a:solidFill>
+                  <a:srgbClr val="333333"/>
+                </a:solidFill>
+                <a:latin typeface="Calibri"/>
+              </a:rPr>
+              <a:t>Common traps</a:t>
+            </a:r>
+          </a:p>
+        </p:txBody>
+      </p:sp>
+      <p:sp>
+        <p:nvSpPr>
+          <p:cNvPr id="4" name="TextBox 3"/>
+          <p:cNvSpPr txBox="1"/>
+          <p:nvPr/>
+        </p:nvSpPr>
+        <p:spPr>
+          <a:xfrm>
+            <a:off x="548640" y="6355080"/>
+            <a:ext cx="11064240" cy="320040"/>
+          </a:xfrm>
+          <a:prstGeom prst="rect">
+            <a:avLst/>
+          </a:prstGeom>
+          <a:noFill/>
+        </p:spPr>
+        <p:txBody>
+          <a:bodyPr wrap="square">
+            <a:noAutofit/>
+          </a:bodyPr>
+          <a:lstStyle/>
+          <a:p>
+            <a:pPr algn="r">
+              <a:lnSpc>
+                <a:spcPts val="2200"/>
+              </a:lnSpc>
+              <a:defRPr sz="1000" b="0">
+                <a:solidFill>
+                  <a:srgbClr val="666666"/>
+                </a:solidFill>
+                <a:latin typeface="Calibri"/>
+              </a:defRPr>
+            </a:pPr>
+            <a:r>
+              <a:t>learn_legalization — 05 abacus row pack</a:t>
+            </a:r>
+          </a:p>
+        </p:txBody>
+      </p:sp>
+    </p:spTree>
+  </p:cSld>
+  <p:clrMapOvr>
+    <a:masterClrMapping/>
+  </p:clrMapOvr>
+</p:sld>
+</file>
+
+<file path=ppt/slides/slide14.xml><?xml version="1.0" encoding="utf-8"?>
+<p:sld xmlns:a="http://schemas.openxmlformats.org/drawingml/2006/main" xmlns:p="http://schemas.openxmlformats.org/presentationml/2006/main" xmlns:r="http://schemas.openxmlformats.org/officeDocument/2006/relationships">
+  <p:cSld>
+    <p:spTree>
+      <p:nvGrpSpPr>
+        <p:cNvPr id="1" name=""/>
+        <p:cNvGrpSpPr/>
+        <p:nvPr/>
+      </p:nvGrpSpPr>
+      <p:grpSpPr/>
+      <p:sp>
+        <p:nvSpPr>
+          <p:cNvPr id="2" name="TextBox 1"/>
+          <p:cNvSpPr txBox="1"/>
+          <p:nvPr/>
+        </p:nvSpPr>
+        <p:spPr>
+          <a:xfrm>
+            <a:off x="548640" y="411480"/>
+            <a:ext cx="11064240" cy="777240"/>
+          </a:xfrm>
+          <a:prstGeom prst="rect">
+            <a:avLst/>
+          </a:prstGeom>
+          <a:noFill/>
+        </p:spPr>
+        <p:txBody>
+          <a:bodyPr wrap="square">
+            <a:noAutofit/>
+          </a:bodyPr>
+          <a:lstStyle/>
+          <a:p>
+            <a:pPr>
+              <a:lnSpc>
+                <a:spcPts val="2200"/>
+              </a:lnSpc>
+            </a:pPr>
+            <a:r>
+              <a:rPr sz="2800" b="1">
+                <a:solidFill>
+                  <a:srgbClr val="1A1A2E"/>
+                </a:solidFill>
+                <a:latin typeface="Calibri"/>
+              </a:rPr>
               <a:t>Your turn</a:t>
             </a:r>
           </a:p>
@@ -4778,6 +5484,125 @@
               <a:t>Abacus is the detailed legalizer in this course: more search, less movement</a:t>
             </a:r>
           </a:p>
+        </p:txBody>
+      </p:sp>
+      <p:sp>
+        <p:nvSpPr>
+          <p:cNvPr id="4" name="TextBox 3"/>
+          <p:cNvSpPr txBox="1"/>
+          <p:nvPr/>
+        </p:nvSpPr>
+        <p:spPr>
+          <a:xfrm>
+            <a:off x="548640" y="6355080"/>
+            <a:ext cx="11064240" cy="320040"/>
+          </a:xfrm>
+          <a:prstGeom prst="rect">
+            <a:avLst/>
+          </a:prstGeom>
+          <a:noFill/>
+        </p:spPr>
+        <p:txBody>
+          <a:bodyPr wrap="square">
+            <a:noAutofit/>
+          </a:bodyPr>
+          <a:lstStyle/>
+          <a:p>
+            <a:pPr algn="r">
+              <a:lnSpc>
+                <a:spcPts val="2200"/>
+              </a:lnSpc>
+              <a:defRPr sz="1000" b="0">
+                <a:solidFill>
+                  <a:srgbClr val="666666"/>
+                </a:solidFill>
+                <a:latin typeface="Calibri"/>
+              </a:defRPr>
+            </a:pPr>
+            <a:r>
+              <a:t>learn_legalization — 05 abacus row pack</a:t>
+            </a:r>
+          </a:p>
+        </p:txBody>
+      </p:sp>
+    </p:spTree>
+  </p:cSld>
+  <p:clrMapOvr>
+    <a:masterClrMapping/>
+  </p:clrMapOvr>
+</p:sld>
+</file>
+
+<file path=ppt/slides/slide3.xml><?xml version="1.0" encoding="utf-8"?>
+<p:sld xmlns:a="http://schemas.openxmlformats.org/drawingml/2006/main" xmlns:p="http://schemas.openxmlformats.org/presentationml/2006/main" xmlns:r="http://schemas.openxmlformats.org/officeDocument/2006/relationships">
+  <p:cSld>
+    <p:spTree>
+      <p:nvGrpSpPr>
+        <p:cNvPr id="1" name=""/>
+        <p:cNvGrpSpPr/>
+        <p:nvPr/>
+      </p:nvGrpSpPr>
+      <p:grpSpPr/>
+      <p:sp>
+        <p:nvSpPr>
+          <p:cNvPr id="2" name="TextBox 1"/>
+          <p:cNvSpPr txBox="1"/>
+          <p:nvPr/>
+        </p:nvSpPr>
+        <p:spPr>
+          <a:xfrm>
+            <a:off x="548640" y="411480"/>
+            <a:ext cx="11064240" cy="777240"/>
+          </a:xfrm>
+          <a:prstGeom prst="rect">
+            <a:avLst/>
+          </a:prstGeom>
+          <a:noFill/>
+        </p:spPr>
+        <p:txBody>
+          <a:bodyPr wrap="square">
+            <a:noAutofit/>
+          </a:bodyPr>
+          <a:lstStyle/>
+          <a:p>
+            <a:pPr>
+              <a:lnSpc>
+                <a:spcPts val="2200"/>
+              </a:lnSpc>
+            </a:pPr>
+            <a:r>
+              <a:rPr sz="2800" b="1">
+                <a:solidFill>
+                  <a:srgbClr val="1A1A2E"/>
+                </a:solidFill>
+                <a:latin typeface="Calibri"/>
+              </a:rPr>
+              <a:t>Pseudocode</a:t>
+            </a:r>
+          </a:p>
+        </p:txBody>
+      </p:sp>
+      <p:sp>
+        <p:nvSpPr>
+          <p:cNvPr id="3" name="TextBox 2"/>
+          <p:cNvSpPr txBox="1"/>
+          <p:nvPr/>
+        </p:nvSpPr>
+        <p:spPr>
+          <a:xfrm>
+            <a:off x="548640" y="1234440"/>
+            <a:ext cx="11064240" cy="4937760"/>
+          </a:xfrm>
+          <a:prstGeom prst="rect">
+            <a:avLst/>
+          </a:prstGeom>
+          <a:noFill/>
+        </p:spPr>
+        <p:txBody>
+          <a:bodyPr wrap="square">
+            <a:noAutofit/>
+          </a:bodyPr>
+          <a:lstStyle/>
           <a:p>
             <a:pPr lvl="0" marL="457200" indent="-228600">
               <a:buFont typeface="Calibri"/>
@@ -4797,7 +5622,73 @@
                 </a:solidFill>
                 <a:latin typeface="Calibri"/>
               </a:rPr>
-              <a:t>&lt;!-- algorithm-walkthrough --&gt;</a:t>
+              <a:t>Abacus needs a nested loop in pseudocode: outer cells in x order, inner trial of every row</a:t>
+            </a:r>
+          </a:p>
+          <a:p>
+            <a:pPr lvl="0" marL="457200" indent="-228600">
+              <a:buFont typeface="Calibri"/>
+              <a:spcAft>
+                <a:spcPts val="1000"/>
+              </a:spcAft>
+              <a:buSzPct val="100000"/>
+              <a:buChar char="•"/>
+              <a:lnSpc>
+                <a:spcPts val="2200"/>
+              </a:lnSpc>
+            </a:pPr>
+            <a:r>
+              <a:rPr sz="2000" b="0">
+                <a:solidFill>
+                  <a:srgbClr val="333333"/>
+                </a:solidFill>
+                <a:latin typeface="Calibri"/>
+              </a:rPr>
+              <a:t>For each trial you compute leftmost legal x and an L1 cost back to the origin</a:t>
+            </a:r>
+          </a:p>
+          <a:p>
+            <a:pPr lvl="0" marL="457200" indent="-228600">
+              <a:buFont typeface="Calibri"/>
+              <a:spcAft>
+                <a:spcPts val="1000"/>
+              </a:spcAft>
+              <a:buSzPct val="100000"/>
+              <a:buChar char="•"/>
+              <a:lnSpc>
+                <a:spcPts val="2200"/>
+              </a:lnSpc>
+            </a:pPr>
+            <a:r>
+              <a:rPr sz="2000" b="0">
+                <a:solidFill>
+                  <a:srgbClr val="333333"/>
+                </a:solidFill>
+                <a:latin typeface="Calibri"/>
+              </a:rPr>
+              <a:t>Open this module's examples file and find the Pseudocode section</a:t>
+            </a:r>
+          </a:p>
+          <a:p>
+            <a:pPr lvl="0" marL="457200" indent="-228600">
+              <a:buFont typeface="Calibri"/>
+              <a:spcAft>
+                <a:spcPts val="1000"/>
+              </a:spcAft>
+              <a:buSzPct val="100000"/>
+              <a:buChar char="•"/>
+              <a:lnSpc>
+                <a:spcPts val="2200"/>
+              </a:lnSpc>
+            </a:pPr>
+            <a:r>
+              <a:rPr sz="2000" b="0">
+                <a:solidFill>
+                  <a:srgbClr val="333333"/>
+                </a:solidFill>
+                <a:latin typeface="Calibri"/>
+              </a:rPr>
+              <a:t>That written sketch is what you implement on the implement track and what the browser</a:t>
             </a:r>
           </a:p>
         </p:txBody>
@@ -4849,7 +5740,462 @@
 </p:sld>
 </file>
 
-<file path=ppt/slides/slide3.xml><?xml version="1.0" encoding="utf-8"?>
+<file path=ppt/slides/slide4.xml><?xml version="1.0" encoding="utf-8"?>
+<p:sld xmlns:a="http://schemas.openxmlformats.org/drawingml/2006/main" xmlns:p="http://schemas.openxmlformats.org/presentationml/2006/main" xmlns:r="http://schemas.openxmlformats.org/officeDocument/2006/relationships">
+  <p:cSld>
+    <p:spTree>
+      <p:nvGrpSpPr>
+        <p:cNvPr id="1" name=""/>
+        <p:cNvGrpSpPr/>
+        <p:nvPr/>
+      </p:nvGrpSpPr>
+      <p:grpSpPr/>
+      <p:sp>
+        <p:nvSpPr>
+          <p:cNvPr id="2" name="TextBox 1"/>
+          <p:cNvSpPr txBox="1"/>
+          <p:nvPr/>
+        </p:nvSpPr>
+        <p:spPr>
+          <a:xfrm>
+            <a:off x="548640" y="411480"/>
+            <a:ext cx="11064240" cy="777240"/>
+          </a:xfrm>
+          <a:prstGeom prst="rect">
+            <a:avLst/>
+          </a:prstGeom>
+          <a:noFill/>
+        </p:spPr>
+        <p:txBody>
+          <a:bodyPr wrap="square">
+            <a:noAutofit/>
+          </a:bodyPr>
+          <a:lstStyle/>
+          <a:p>
+            <a:pPr>
+              <a:lnSpc>
+                <a:spcPts val="2200"/>
+              </a:lnSpc>
+            </a:pPr>
+            <a:r>
+              <a:rPr sz="2800" b="1">
+                <a:solidFill>
+                  <a:srgbClr val="1A1A2E"/>
+                </a:solidFill>
+                <a:latin typeface="Calibri"/>
+              </a:rPr>
+              <a:t>Algorithm sketch</a:t>
+            </a:r>
+          </a:p>
+        </p:txBody>
+      </p:sp>
+      <p:sp>
+        <p:nvSpPr>
+          <p:cNvPr id="3" name="TextBox 2"/>
+          <p:cNvSpPr txBox="1"/>
+          <p:nvPr/>
+        </p:nvSpPr>
+        <p:spPr>
+          <a:xfrm>
+            <a:off x="548640" y="1234440"/>
+            <a:ext cx="11064240" cy="4937760"/>
+          </a:xfrm>
+          <a:prstGeom prst="rect">
+            <a:avLst/>
+          </a:prstGeom>
+          <a:noFill/>
+        </p:spPr>
+        <p:txBody>
+          <a:bodyPr wrap="square">
+            <a:noAutofit/>
+          </a:bodyPr>
+          <a:lstStyle/>
+          <a:p>
+            <a:pPr lvl="0" marL="457200" indent="-228600">
+              <a:buFont typeface="Calibri"/>
+              <a:spcAft>
+                <a:spcPts val="1000"/>
+              </a:spcAft>
+              <a:buSzPct val="100000"/>
+              <a:buChar char="•"/>
+              <a:lnSpc>
+                <a:spcPts val="2200"/>
+              </a:lnSpc>
+            </a:pPr>
+            <a:r>
+              <a:rPr sz="2000" b="0">
+                <a:solidFill>
+                  <a:srgbClr val="333333"/>
+                </a:solidFill>
+                <a:latin typeface="Calibri"/>
+              </a:rPr>
+              <a:t>Fixed macros sit first so their intervals block later trials</a:t>
+            </a:r>
+          </a:p>
+          <a:p>
+            <a:pPr lvl="0" marL="457200" indent="-228600">
+              <a:buFont typeface="Calibri"/>
+              <a:spcAft>
+                <a:spcPts val="1000"/>
+              </a:spcAft>
+              <a:buSzPct val="100000"/>
+              <a:buChar char="•"/>
+              <a:lnSpc>
+                <a:spcPts val="2200"/>
+              </a:lnSpc>
+            </a:pPr>
+            <a:r>
+              <a:rPr sz="2000" b="0">
+                <a:solidFill>
+                  <a:srgbClr val="333333"/>
+                </a:solidFill>
+                <a:latin typeface="Calibri"/>
+              </a:rPr>
+              <a:t>On the overlap seed the sketch lands A at four two</a:t>
+            </a:r>
+          </a:p>
+        </p:txBody>
+      </p:sp>
+      <p:sp>
+        <p:nvSpPr>
+          <p:cNvPr id="4" name="TextBox 3"/>
+          <p:cNvSpPr txBox="1"/>
+          <p:nvPr/>
+        </p:nvSpPr>
+        <p:spPr>
+          <a:xfrm>
+            <a:off x="548640" y="6355080"/>
+            <a:ext cx="11064240" cy="320040"/>
+          </a:xfrm>
+          <a:prstGeom prst="rect">
+            <a:avLst/>
+          </a:prstGeom>
+          <a:noFill/>
+        </p:spPr>
+        <p:txBody>
+          <a:bodyPr wrap="square">
+            <a:noAutofit/>
+          </a:bodyPr>
+          <a:lstStyle/>
+          <a:p>
+            <a:pPr algn="r">
+              <a:lnSpc>
+                <a:spcPts val="2200"/>
+              </a:lnSpc>
+              <a:defRPr sz="1000" b="0">
+                <a:solidFill>
+                  <a:srgbClr val="666666"/>
+                </a:solidFill>
+                <a:latin typeface="Calibri"/>
+              </a:defRPr>
+            </a:pPr>
+            <a:r>
+              <a:t>learn_legalization — 05 abacus row pack</a:t>
+            </a:r>
+          </a:p>
+        </p:txBody>
+      </p:sp>
+    </p:spTree>
+  </p:cSld>
+  <p:clrMapOvr>
+    <a:masterClrMapping/>
+  </p:clrMapOvr>
+</p:sld>
+</file>
+
+<file path=ppt/slides/slide5.xml><?xml version="1.0" encoding="utf-8"?>
+<p:sld xmlns:a="http://schemas.openxmlformats.org/drawingml/2006/main" xmlns:p="http://schemas.openxmlformats.org/presentationml/2006/main" xmlns:r="http://schemas.openxmlformats.org/officeDocument/2006/relationships">
+  <p:cSld>
+    <p:spTree>
+      <p:nvGrpSpPr>
+        <p:cNvPr id="1" name=""/>
+        <p:cNvGrpSpPr/>
+        <p:nvPr/>
+      </p:nvGrpSpPr>
+      <p:grpSpPr/>
+      <p:sp>
+        <p:nvSpPr>
+          <p:cNvPr id="2" name="TextBox 1"/>
+          <p:cNvSpPr txBox="1"/>
+          <p:nvPr/>
+        </p:nvSpPr>
+        <p:spPr>
+          <a:xfrm>
+            <a:off x="548640" y="411480"/>
+            <a:ext cx="11064240" cy="777240"/>
+          </a:xfrm>
+          <a:prstGeom prst="rect">
+            <a:avLst/>
+          </a:prstGeom>
+          <a:noFill/>
+        </p:spPr>
+        <p:txBody>
+          <a:bodyPr wrap="square">
+            <a:noAutofit/>
+          </a:bodyPr>
+          <a:lstStyle/>
+          <a:p>
+            <a:pPr>
+              <a:lnSpc>
+                <a:spcPts val="2200"/>
+              </a:lnSpc>
+            </a:pPr>
+            <a:r>
+              <a:rPr sz="2800" b="1">
+                <a:solidFill>
+                  <a:srgbClr val="1A1A2E"/>
+                </a:solidFill>
+                <a:latin typeface="Calibri"/>
+              </a:rPr>
+              <a:t>Algorithm sketch — try these</a:t>
+            </a:r>
+          </a:p>
+        </p:txBody>
+      </p:sp>
+      <p:sp>
+        <p:nvSpPr>
+          <p:cNvPr id="3" name="TextBox 2"/>
+          <p:cNvSpPr txBox="1"/>
+          <p:nvPr/>
+        </p:nvSpPr>
+        <p:spPr>
+          <a:xfrm>
+            <a:off x="548640" y="1143000"/>
+            <a:ext cx="11064240" cy="5029200"/>
+          </a:xfrm>
+          <a:prstGeom prst="rect">
+            <a:avLst/>
+          </a:prstGeom>
+          <a:solidFill>
+            <a:srgbClr val="F4F4F4"/>
+          </a:solidFill>
+        </p:spPr>
+        <p:txBody>
+          <a:bodyPr wrap="square">
+            <a:noAutofit/>
+          </a:bodyPr>
+          <a:lstStyle/>
+          <a:p>
+            <a:pPr>
+              <a:lnSpc>
+                <a:spcPts val="2200"/>
+              </a:lnSpc>
+              <a:spcAft>
+                <a:spcPts val="400"/>
+              </a:spcAft>
+            </a:pPr>
+            <a:r>
+              <a:rPr sz="2000" b="0">
+                <a:solidFill>
+                  <a:srgbClr val="333333"/>
+                </a:solidFill>
+                <a:latin typeface="Consolas"/>
+              </a:rPr>
+              <a:t>INPUT: origin, widths, rows Y[], fixed macros</a:t>
+            </a:r>
+          </a:p>
+          <a:p>
+            <a:pPr>
+              <a:lnSpc>
+                <a:spcPts val="2200"/>
+              </a:lnSpc>
+              <a:spcAft>
+                <a:spcPts val="400"/>
+              </a:spcAft>
+            </a:pPr>
+            <a:r>
+              <a:rPr sz="2000" b="0">
+                <a:solidFill>
+                  <a:srgbClr val="333333"/>
+                </a:solidFill>
+                <a:latin typeface="Consolas"/>
+              </a:rPr>
+              <a:t>OUTPUT: legal pack minimizing Σ L1 move</a:t>
+            </a:r>
+          </a:p>
+          <a:p>
+            <a:pPr>
+              <a:lnSpc>
+                <a:spcPts val="2200"/>
+              </a:lnSpc>
+              <a:spcAft>
+                <a:spcPts val="400"/>
+              </a:spcAft>
+            </a:pPr>
+            <a:r>
+              <a:rPr sz="2000" b="0">
+                <a:solidFill>
+                  <a:srgbClr val="333333"/>
+                </a:solidFill>
+                <a:latin typeface="Consolas"/>
+              </a:rPr>
+              <a:t>place fixed macros first</a:t>
+            </a:r>
+          </a:p>
+          <a:p>
+            <a:pPr>
+              <a:lnSpc>
+                <a:spcPts val="2200"/>
+              </a:lnSpc>
+              <a:spcAft>
+                <a:spcPts val="400"/>
+              </a:spcAft>
+            </a:pPr>
+            <a:r>
+              <a:rPr sz="2000" b="0">
+                <a:solidFill>
+                  <a:srgbClr val="333333"/>
+                </a:solidFill>
+                <a:latin typeface="Consolas"/>
+              </a:rPr>
+              <a:t>order ← movables by origin.x</a:t>
+            </a:r>
+          </a:p>
+          <a:p>
+            <a:pPr>
+              <a:lnSpc>
+                <a:spcPts val="2200"/>
+              </a:lnSpc>
+              <a:spcAft>
+                <a:spcPts val="400"/>
+              </a:spcAft>
+            </a:pPr>
+            <a:r>
+              <a:rPr sz="2000" b="0">
+                <a:solidFill>
+                  <a:srgbClr val="333333"/>
+                </a:solidFill>
+                <a:latin typeface="Consolas"/>
+              </a:rPr>
+              <a:t>for each cell c in order:</a:t>
+            </a:r>
+          </a:p>
+          <a:p>
+            <a:pPr>
+              <a:lnSpc>
+                <a:spcPts val="2200"/>
+              </a:lnSpc>
+              <a:spcAft>
+                <a:spcPts val="400"/>
+              </a:spcAft>
+            </a:pPr>
+            <a:r>
+              <a:rPr sz="2000" b="0">
+                <a:solidFill>
+                  <a:srgbClr val="333333"/>
+                </a:solidFill>
+                <a:latin typeface="Consolas"/>
+              </a:rPr>
+              <a:t>  for each row y: trial leftmost legal x</a:t>
+            </a:r>
+          </a:p>
+          <a:p>
+            <a:pPr>
+              <a:lnSpc>
+                <a:spcPts val="2200"/>
+              </a:lnSpc>
+              <a:spcAft>
+                <a:spcPts val="400"/>
+              </a:spcAft>
+            </a:pPr>
+            <a:r>
+              <a:rPr sz="2000" b="0">
+                <a:solidFill>
+                  <a:srgbClr val="333333"/>
+                </a:solidFill>
+                <a:latin typeface="Consolas"/>
+              </a:rPr>
+              <a:t>  keep (x,y) with min |Δx|+|Δy| to origin</a:t>
+            </a:r>
+          </a:p>
+          <a:p>
+            <a:pPr>
+              <a:lnSpc>
+                <a:spcPts val="2200"/>
+              </a:lnSpc>
+              <a:spcAft>
+                <a:spcPts val="400"/>
+              </a:spcAft>
+            </a:pPr>
+            <a:r>
+              <a:rPr sz="2000" b="0">
+                <a:solidFill>
+                  <a:srgbClr val="333333"/>
+                </a:solidFill>
+                <a:latin typeface="Consolas"/>
+              </a:rPr>
+              <a:t>  place c at best</a:t>
+            </a:r>
+          </a:p>
+          <a:p>
+            <a:pPr>
+              <a:lnSpc>
+                <a:spcPts val="2200"/>
+              </a:lnSpc>
+              <a:spcAft>
+                <a:spcPts val="400"/>
+              </a:spcAft>
+            </a:pPr>
+            <a:r>
+              <a:rPr sz="2000" b="0">
+                <a:solidFill>
+                  <a:srgbClr val="333333"/>
+                </a:solidFill>
+                <a:latin typeface="Consolas"/>
+              </a:rPr>
+              <a:t>GOLDEN: A(4,2) B(4,0) C(4,4); disp=4; HPWL=38</a:t>
+            </a:r>
+          </a:p>
+        </p:txBody>
+      </p:sp>
+      <p:sp>
+        <p:nvSpPr>
+          <p:cNvPr id="4" name="TextBox 3"/>
+          <p:cNvSpPr txBox="1"/>
+          <p:nvPr/>
+        </p:nvSpPr>
+        <p:spPr>
+          <a:xfrm>
+            <a:off x="548640" y="6355080"/>
+            <a:ext cx="11064240" cy="320040"/>
+          </a:xfrm>
+          <a:prstGeom prst="rect">
+            <a:avLst/>
+          </a:prstGeom>
+          <a:noFill/>
+        </p:spPr>
+        <p:txBody>
+          <a:bodyPr wrap="square">
+            <a:noAutofit/>
+          </a:bodyPr>
+          <a:lstStyle/>
+          <a:p>
+            <a:pPr algn="r">
+              <a:lnSpc>
+                <a:spcPts val="2200"/>
+              </a:lnSpc>
+              <a:defRPr sz="1000" b="0">
+                <a:solidFill>
+                  <a:srgbClr val="666666"/>
+                </a:solidFill>
+                <a:latin typeface="Calibri"/>
+              </a:defRPr>
+            </a:pPr>
+            <a:r>
+              <a:t>learn_legalization — 05 abacus row pack</a:t>
+            </a:r>
+          </a:p>
+        </p:txBody>
+      </p:sp>
+    </p:spTree>
+  </p:cSld>
+  <p:clrMapOvr>
+    <a:masterClrMapping/>
+  </p:clrMapOvr>
+</p:sld>
+</file>
+
+<file path=ppt/slides/slide6.xml><?xml version="1.0" encoding="utf-8"?>
 <p:sld xmlns:a="http://schemas.openxmlformats.org/drawingml/2006/main" xmlns:p="http://schemas.openxmlformats.org/presentationml/2006/main" xmlns:r="http://schemas.openxmlformats.org/officeDocument/2006/relationships">
   <p:cSld>
     <p:spTree>
@@ -5008,7 +6354,7 @@
 </p:sld>
 </file>
 
-<file path=ppt/slides/slide4.xml><?xml version="1.0" encoding="utf-8"?>
+<file path=ppt/slides/slide7.xml><?xml version="1.0" encoding="utf-8"?>
 <p:sld xmlns:a="http://schemas.openxmlformats.org/drawingml/2006/main" xmlns:p="http://schemas.openxmlformats.org/presentationml/2006/main" xmlns:r="http://schemas.openxmlformats.org/officeDocument/2006/relationships">
   <p:cSld>
     <p:spTree>
@@ -5167,7 +6513,7 @@
 </p:sld>
 </file>
 
-<file path=ppt/slides/slide5.xml><?xml version="1.0" encoding="utf-8"?>
+<file path=ppt/slides/slide8.xml><?xml version="1.0" encoding="utf-8"?>
 <p:sld xmlns:a="http://schemas.openxmlformats.org/drawingml/2006/main" xmlns:p="http://schemas.openxmlformats.org/presentationml/2006/main" xmlns:r="http://schemas.openxmlformats.org/officeDocument/2006/relationships">
   <p:cSld>
     <p:spTree>
@@ -5326,7 +6672,7 @@
 </p:sld>
 </file>
 
-<file path=ppt/slides/slide6.xml><?xml version="1.0" encoding="utf-8"?>
+<file path=ppt/slides/slide9.xml><?xml version="1.0" encoding="utf-8"?>
 <p:sld xmlns:a="http://schemas.openxmlformats.org/drawingml/2006/main" xmlns:p="http://schemas.openxmlformats.org/presentationml/2006/main" xmlns:r="http://schemas.openxmlformats.org/officeDocument/2006/relationships">
   <p:cSld>
     <p:spTree>
@@ -5441,553 +6787,6 @@
       <p:sp>
         <p:nvSpPr>
           <p:cNvPr id="5" name="TextBox 4"/>
-          <p:cNvSpPr txBox="1"/>
-          <p:nvPr/>
-        </p:nvSpPr>
-        <p:spPr>
-          <a:xfrm>
-            <a:off x="548640" y="6355080"/>
-            <a:ext cx="11064240" cy="320040"/>
-          </a:xfrm>
-          <a:prstGeom prst="rect">
-            <a:avLst/>
-          </a:prstGeom>
-          <a:noFill/>
-        </p:spPr>
-        <p:txBody>
-          <a:bodyPr wrap="square">
-            <a:noAutofit/>
-          </a:bodyPr>
-          <a:lstStyle/>
-          <a:p>
-            <a:pPr algn="r">
-              <a:lnSpc>
-                <a:spcPts val="2200"/>
-              </a:lnSpc>
-              <a:defRPr sz="1000" b="0">
-                <a:solidFill>
-                  <a:srgbClr val="666666"/>
-                </a:solidFill>
-                <a:latin typeface="Calibri"/>
-              </a:defRPr>
-            </a:pPr>
-            <a:r>
-              <a:t>learn_legalization — 05 abacus row pack</a:t>
-            </a:r>
-          </a:p>
-        </p:txBody>
-      </p:sp>
-    </p:spTree>
-  </p:cSld>
-  <p:clrMapOvr>
-    <a:masterClrMapping/>
-  </p:clrMapOvr>
-</p:sld>
-</file>
-
-<file path=ppt/slides/slide7.xml><?xml version="1.0" encoding="utf-8"?>
-<p:sld xmlns:a="http://schemas.openxmlformats.org/drawingml/2006/main" xmlns:p="http://schemas.openxmlformats.org/presentationml/2006/main" xmlns:r="http://schemas.openxmlformats.org/officeDocument/2006/relationships">
-  <p:cSld>
-    <p:spTree>
-      <p:nvGrpSpPr>
-        <p:cNvPr id="1" name=""/>
-        <p:cNvGrpSpPr/>
-        <p:nvPr/>
-      </p:nvGrpSpPr>
-      <p:grpSpPr/>
-      <p:sp>
-        <p:nvSpPr>
-          <p:cNvPr id="2" name="TextBox 1"/>
-          <p:cNvSpPr txBox="1"/>
-          <p:nvPr/>
-        </p:nvSpPr>
-        <p:spPr>
-          <a:xfrm>
-            <a:off x="548640" y="411480"/>
-            <a:ext cx="11064240" cy="777240"/>
-          </a:xfrm>
-          <a:prstGeom prst="rect">
-            <a:avLst/>
-          </a:prstGeom>
-          <a:noFill/>
-        </p:spPr>
-        <p:txBody>
-          <a:bodyPr wrap="square">
-            <a:noAutofit/>
-          </a:bodyPr>
-          <a:lstStyle/>
-          <a:p>
-            <a:pPr>
-              <a:lnSpc>
-                <a:spcPts val="2200"/>
-              </a:lnSpc>
-            </a:pPr>
-            <a:r>
-              <a:rPr sz="2800" b="1">
-                <a:solidFill>
-                  <a:srgbClr val="1A1A2E"/>
-                </a:solidFill>
-                <a:latin typeface="Calibri"/>
-              </a:rPr>
-              <a:t>Abacus minimizes movement</a:t>
-            </a:r>
-          </a:p>
-        </p:txBody>
-      </p:sp>
-      <p:pic>
-        <p:nvPicPr>
-          <p:cNvPr id="3" name="Picture 2" descr="05-takeaway.png"/>
-          <p:cNvPicPr>
-            <a:picLocks noChangeAspect="1"/>
-          </p:cNvPicPr>
-          <p:nvPr/>
-        </p:nvPicPr>
-        <p:blipFill>
-          <a:blip r:embed="rId2"/>
-          <a:stretch>
-            <a:fillRect/>
-          </a:stretch>
-        </p:blipFill>
-        <p:spPr>
-          <a:xfrm>
-            <a:off x="548640" y="1143000"/>
-            <a:ext cx="9404113" cy="4572000"/>
-          </a:xfrm>
-          <a:prstGeom prst="rect">
-            <a:avLst/>
-          </a:prstGeom>
-        </p:spPr>
-      </p:pic>
-      <p:sp>
-        <p:nvSpPr>
-          <p:cNvPr id="4" name="TextBox 3"/>
-          <p:cNvSpPr txBox="1"/>
-          <p:nvPr/>
-        </p:nvSpPr>
-        <p:spPr>
-          <a:xfrm>
-            <a:off x="548640" y="5897880"/>
-            <a:ext cx="11064240" cy="411480"/>
-          </a:xfrm>
-          <a:prstGeom prst="rect">
-            <a:avLst/>
-          </a:prstGeom>
-          <a:noFill/>
-        </p:spPr>
-        <p:txBody>
-          <a:bodyPr wrap="square">
-            <a:noAutofit/>
-          </a:bodyPr>
-          <a:lstStyle/>
-          <a:p>
-            <a:pPr>
-              <a:lnSpc>
-                <a:spcPts val="2200"/>
-              </a:lnSpc>
-            </a:pPr>
-            <a:r>
-              <a:rPr sz="1200" b="0">
-                <a:solidFill>
-                  <a:srgbClr val="333333"/>
-                </a:solidFill>
-                <a:latin typeface="Calibri"/>
-              </a:rPr>
-              <a:t>Abacus minimizes movement</a:t>
-            </a:r>
-          </a:p>
-        </p:txBody>
-      </p:sp>
-      <p:sp>
-        <p:nvSpPr>
-          <p:cNvPr id="5" name="TextBox 4"/>
-          <p:cNvSpPr txBox="1"/>
-          <p:nvPr/>
-        </p:nvSpPr>
-        <p:spPr>
-          <a:xfrm>
-            <a:off x="548640" y="6355080"/>
-            <a:ext cx="11064240" cy="320040"/>
-          </a:xfrm>
-          <a:prstGeom prst="rect">
-            <a:avLst/>
-          </a:prstGeom>
-          <a:noFill/>
-        </p:spPr>
-        <p:txBody>
-          <a:bodyPr wrap="square">
-            <a:noAutofit/>
-          </a:bodyPr>
-          <a:lstStyle/>
-          <a:p>
-            <a:pPr algn="r">
-              <a:lnSpc>
-                <a:spcPts val="2200"/>
-              </a:lnSpc>
-              <a:defRPr sz="1000" b="0">
-                <a:solidFill>
-                  <a:srgbClr val="666666"/>
-                </a:solidFill>
-                <a:latin typeface="Calibri"/>
-              </a:defRPr>
-            </a:pPr>
-            <a:r>
-              <a:t>learn_legalization — 05 abacus row pack</a:t>
-            </a:r>
-          </a:p>
-        </p:txBody>
-      </p:sp>
-    </p:spTree>
-  </p:cSld>
-  <p:clrMapOvr>
-    <a:masterClrMapping/>
-  </p:clrMapOvr>
-</p:sld>
-</file>
-
-<file path=ppt/slides/slide8.xml><?xml version="1.0" encoding="utf-8"?>
-<p:sld xmlns:a="http://schemas.openxmlformats.org/drawingml/2006/main" xmlns:p="http://schemas.openxmlformats.org/presentationml/2006/main" xmlns:r="http://schemas.openxmlformats.org/officeDocument/2006/relationships">
-  <p:cSld>
-    <p:spTree>
-      <p:nvGrpSpPr>
-        <p:cNvPr id="1" name=""/>
-        <p:cNvGrpSpPr/>
-        <p:nvPr/>
-      </p:nvGrpSpPr>
-      <p:grpSpPr/>
-      <p:sp>
-        <p:nvSpPr>
-          <p:cNvPr id="2" name="TextBox 1"/>
-          <p:cNvSpPr txBox="1"/>
-          <p:nvPr/>
-        </p:nvSpPr>
-        <p:spPr>
-          <a:xfrm>
-            <a:off x="548640" y="411480"/>
-            <a:ext cx="11064240" cy="777240"/>
-          </a:xfrm>
-          <a:prstGeom prst="rect">
-            <a:avLst/>
-          </a:prstGeom>
-          <a:noFill/>
-        </p:spPr>
-        <p:txBody>
-          <a:bodyPr wrap="square">
-            <a:noAutofit/>
-          </a:bodyPr>
-          <a:lstStyle/>
-          <a:p>
-            <a:pPr>
-              <a:lnSpc>
-                <a:spcPts val="2200"/>
-              </a:lnSpc>
-            </a:pPr>
-            <a:r>
-              <a:rPr sz="2800" b="1">
-                <a:solidFill>
-                  <a:srgbClr val="1A1A2E"/>
-                </a:solidFill>
-                <a:latin typeface="Calibri"/>
-              </a:rPr>
-              <a:t>Browser lab track</a:t>
-            </a:r>
-          </a:p>
-        </p:txBody>
-      </p:sp>
-      <p:sp>
-        <p:nvSpPr>
-          <p:cNvPr id="3" name="TextBox 2"/>
-          <p:cNvSpPr txBox="1"/>
-          <p:nvPr/>
-        </p:nvSpPr>
-        <p:spPr>
-          <a:xfrm>
-            <a:off x="548640" y="1234440"/>
-            <a:ext cx="11064240" cy="4937760"/>
-          </a:xfrm>
-          <a:prstGeom prst="rect">
-            <a:avLst/>
-          </a:prstGeom>
-          <a:noFill/>
-        </p:spPr>
-        <p:txBody>
-          <a:bodyPr wrap="square">
-            <a:noAutofit/>
-          </a:bodyPr>
-          <a:lstStyle/>
-          <a:p>
-            <a:pPr lvl="0" marL="457200" indent="-228600">
-              <a:buFont typeface="Calibri"/>
-              <a:spcAft>
-                <a:spcPts val="1000"/>
-              </a:spcAft>
-              <a:buSzPct val="100000"/>
-              <a:buChar char="•"/>
-              <a:lnSpc>
-                <a:spcPts val="2200"/>
-              </a:lnSpc>
-            </a:pPr>
-            <a:r>
-              <a:rPr sz="2000" b="0">
-                <a:solidFill>
-                  <a:srgbClr val="333333"/>
-                </a:solidFill>
-                <a:latin typeface="Calibri"/>
-              </a:rPr>
-              <a:t>In the browser lab track, open the </a:t>
-            </a:r>
-            <a:r>
-              <a:rPr sz="2000" b="1">
-                <a:solidFill>
-                  <a:srgbClr val="333333"/>
-                </a:solidFill>
-                <a:latin typeface="Calibri"/>
-              </a:rPr>
-              <a:t>abacus-row-pack</a:t>
-            </a:r>
-            <a:r>
-              <a:rPr sz="2000" b="0">
-                <a:solidFill>
-                  <a:srgbClr val="333333"/>
-                </a:solidFill>
-                <a:latin typeface="Calibri"/>
-              </a:rPr>
-              <a:t> lab from the tools shelf</a:t>
-            </a:r>
-          </a:p>
-          <a:p>
-            <a:pPr lvl="0" marL="457200" indent="-228600">
-              <a:buFont typeface="Calibri"/>
-              <a:spcAft>
-                <a:spcPts val="1000"/>
-              </a:spcAft>
-              <a:buSzPct val="100000"/>
-              <a:buChar char="•"/>
-              <a:lnSpc>
-                <a:spcPts val="2200"/>
-              </a:lnSpc>
-            </a:pPr>
-            <a:r>
-              <a:rPr sz="2000" b="0">
-                <a:solidFill>
-                  <a:srgbClr val="333333"/>
-                </a:solidFill>
-                <a:latin typeface="Calibri"/>
-              </a:rPr>
-              <a:t>Load the overlap or float starter, run the legalizer once</a:t>
-            </a:r>
-          </a:p>
-          <a:p>
-            <a:pPr lvl="0" marL="457200" indent="-228600">
-              <a:buFont typeface="Calibri"/>
-              <a:spcAft>
-                <a:spcPts val="1000"/>
-              </a:spcAft>
-              <a:buSzPct val="100000"/>
-              <a:buChar char="•"/>
-              <a:lnSpc>
-                <a:spcPts val="2200"/>
-              </a:lnSpc>
-            </a:pPr>
-            <a:r>
-              <a:rPr sz="2000" b="0">
-                <a:solidFill>
-                  <a:srgbClr val="333333"/>
-                </a:solidFill>
-                <a:latin typeface="Calibri"/>
-              </a:rPr>
-              <a:t>Work the challenges that lock the goldens</a:t>
-            </a:r>
-          </a:p>
-        </p:txBody>
-      </p:sp>
-      <p:sp>
-        <p:nvSpPr>
-          <p:cNvPr id="4" name="TextBox 3"/>
-          <p:cNvSpPr txBox="1"/>
-          <p:nvPr/>
-        </p:nvSpPr>
-        <p:spPr>
-          <a:xfrm>
-            <a:off x="548640" y="6355080"/>
-            <a:ext cx="11064240" cy="320040"/>
-          </a:xfrm>
-          <a:prstGeom prst="rect">
-            <a:avLst/>
-          </a:prstGeom>
-          <a:noFill/>
-        </p:spPr>
-        <p:txBody>
-          <a:bodyPr wrap="square">
-            <a:noAutofit/>
-          </a:bodyPr>
-          <a:lstStyle/>
-          <a:p>
-            <a:pPr algn="r">
-              <a:lnSpc>
-                <a:spcPts val="2200"/>
-              </a:lnSpc>
-              <a:defRPr sz="1000" b="0">
-                <a:solidFill>
-                  <a:srgbClr val="666666"/>
-                </a:solidFill>
-                <a:latin typeface="Calibri"/>
-              </a:defRPr>
-            </a:pPr>
-            <a:r>
-              <a:t>learn_legalization — 05 abacus row pack</a:t>
-            </a:r>
-          </a:p>
-        </p:txBody>
-      </p:sp>
-    </p:spTree>
-  </p:cSld>
-  <p:clrMapOvr>
-    <a:masterClrMapping/>
-  </p:clrMapOvr>
-</p:sld>
-</file>
-
-<file path=ppt/slides/slide9.xml><?xml version="1.0" encoding="utf-8"?>
-<p:sld xmlns:a="http://schemas.openxmlformats.org/drawingml/2006/main" xmlns:p="http://schemas.openxmlformats.org/presentationml/2006/main" xmlns:r="http://schemas.openxmlformats.org/officeDocument/2006/relationships">
-  <p:cSld>
-    <p:spTree>
-      <p:nvGrpSpPr>
-        <p:cNvPr id="1" name=""/>
-        <p:cNvGrpSpPr/>
-        <p:nvPr/>
-      </p:nvGrpSpPr>
-      <p:grpSpPr/>
-      <p:sp>
-        <p:nvSpPr>
-          <p:cNvPr id="2" name="TextBox 1"/>
-          <p:cNvSpPr txBox="1"/>
-          <p:nvPr/>
-        </p:nvSpPr>
-        <p:spPr>
-          <a:xfrm>
-            <a:off x="548640" y="411480"/>
-            <a:ext cx="11064240" cy="777240"/>
-          </a:xfrm>
-          <a:prstGeom prst="rect">
-            <a:avLst/>
-          </a:prstGeom>
-          <a:noFill/>
-        </p:spPr>
-        <p:txBody>
-          <a:bodyPr wrap="square">
-            <a:noAutofit/>
-          </a:bodyPr>
-          <a:lstStyle/>
-          <a:p>
-            <a:pPr>
-              <a:lnSpc>
-                <a:spcPts val="2200"/>
-              </a:lnSpc>
-            </a:pPr>
-            <a:r>
-              <a:rPr sz="2800" b="1">
-                <a:solidFill>
-                  <a:srgbClr val="1A1A2E"/>
-                </a:solidFill>
-                <a:latin typeface="Calibri"/>
-              </a:rPr>
-              <a:t>Implement track</a:t>
-            </a:r>
-          </a:p>
-        </p:txBody>
-      </p:sp>
-      <p:sp>
-        <p:nvSpPr>
-          <p:cNvPr id="3" name="TextBox 2"/>
-          <p:cNvSpPr txBox="1"/>
-          <p:nvPr/>
-        </p:nvSpPr>
-        <p:spPr>
-          <a:xfrm>
-            <a:off x="548640" y="1234440"/>
-            <a:ext cx="11064240" cy="4937760"/>
-          </a:xfrm>
-          <a:prstGeom prst="rect">
-            <a:avLst/>
-          </a:prstGeom>
-          <a:noFill/>
-        </p:spPr>
-        <p:txBody>
-          <a:bodyPr wrap="square">
-            <a:noAutofit/>
-          </a:bodyPr>
-          <a:lstStyle/>
-          <a:p>
-            <a:pPr lvl="0" marL="457200" indent="-228600">
-              <a:buFont typeface="Calibri"/>
-              <a:spcAft>
-                <a:spcPts val="1000"/>
-              </a:spcAft>
-              <a:buSzPct val="100000"/>
-              <a:buChar char="•"/>
-              <a:lnSpc>
-                <a:spcPts val="2200"/>
-              </a:lnSpc>
-            </a:pPr>
-            <a:r>
-              <a:rPr sz="2000" b="0">
-                <a:solidFill>
-                  <a:srgbClr val="333333"/>
-                </a:solidFill>
-                <a:latin typeface="Calibri"/>
-              </a:rPr>
-              <a:t>In the implement track, open this module's examples and the course `common/` solvers</a:t>
-            </a:r>
-          </a:p>
-          <a:p>
-            <a:pPr lvl="0" marL="457200" indent="-228600">
-              <a:buFont typeface="Calibri"/>
-              <a:spcAft>
-                <a:spcPts val="1000"/>
-              </a:spcAft>
-              <a:buSzPct val="100000"/>
-              <a:buChar char="•"/>
-              <a:lnSpc>
-                <a:spcPts val="2200"/>
-              </a:lnSpc>
-            </a:pPr>
-            <a:r>
-              <a:rPr sz="2000" b="0">
-                <a:solidFill>
-                  <a:srgbClr val="333333"/>
-                </a:solidFill>
-                <a:latin typeface="Calibri"/>
-              </a:rPr>
-              <a:t>Parse `tiny_legal.json`, run the algorithm with deterministic coordinates</a:t>
-            </a:r>
-          </a:p>
-          <a:p>
-            <a:pPr lvl="0" marL="457200" indent="-228600">
-              <a:buFont typeface="Calibri"/>
-              <a:spcAft>
-                <a:spcPts val="1000"/>
-              </a:spcAft>
-              <a:buSzPct val="100000"/>
-              <a:buChar char="•"/>
-              <a:lnSpc>
-                <a:spcPts val="2200"/>
-              </a:lnSpc>
-            </a:pPr>
-            <a:r>
-              <a:rPr sz="2000" b="0">
-                <a:solidFill>
-                  <a:srgbClr val="333333"/>
-                </a:solidFill>
-                <a:latin typeface="Calibri"/>
-              </a:rPr>
-              <a:t>Match the browser goldens before you claim the checklist</a:t>
-            </a:r>
-          </a:p>
-        </p:txBody>
-      </p:sp>
-      <p:sp>
-        <p:nvSpPr>
-          <p:cNvPr id="4" name="TextBox 3"/>
           <p:cNvSpPr txBox="1"/>
           <p:nvPr/>
         </p:nvSpPr>
